--- a/submission/AesCodeNexus_Round1_Submission_Final_Technical_Patient_Deterioration_TeamReady.pptx
+++ b/submission/AesCodeNexus_Round1_Submission_Final_Technical_Patient_Deterioration_TeamReady.pptx
@@ -6339,7 +6339,7 @@
                 </a:lnSpc>
               </a:pPr>
               <a:r>
-                <a:t>[Add Team Name]</a:t>
+                <a:t>Aalam dhudh soda</a:t>
               </a:r>
             </a:p>
           </p:txBody>
@@ -6536,7 +6536,7 @@
                 </a:lnSpc>
               </a:pPr>
               <a:r>
-                <a:t>[Add Team ID]</a:t>
+                <a:t>anc-052</a:t>
               </a:r>
             </a:p>
           </p:txBody>
@@ -8514,7 +8514,7 @@
                 </a:lnSpc>
               </a:pPr>
               <a:r>
-                <a:t>Team: [Add Team Name]  |  ID: [Add Team ID]</a:t>
+                <a:t>Team: Aalam dhudh soda  |  ID: anc-052</a:t>
               </a:r>
             </a:p>
           </p:txBody>
@@ -11102,7 +11102,7 @@
                 </a:lnSpc>
               </a:pPr>
               <a:r>
-                <a:t>Team: [Add Team Name]  |  ID: [Add Team ID]</a:t>
+                <a:t>Team: Aalam dhudh soda  |  ID: anc-052</a:t>
               </a:r>
             </a:p>
           </p:txBody>
@@ -13001,7 +13001,7 @@
                 </a:lnSpc>
               </a:pPr>
               <a:r>
-                <a:t>Team: [Add Team Name]  |  ID: [Add Team ID]</a:t>
+                <a:t>Team: Aalam dhudh soda  |  ID: anc-052</a:t>
               </a:r>
             </a:p>
           </p:txBody>
@@ -18726,7 +18726,7 @@
                 </a:lnSpc>
               </a:pPr>
               <a:r>
-                <a:t>Team: [Add Team Name]  |  ID: [Add Team ID]</a:t>
+                <a:t>Team: Aalam dhudh soda  |  ID: anc-052</a:t>
               </a:r>
             </a:p>
           </p:txBody>
@@ -24319,7 +24319,7 @@
                 </a:lnSpc>
               </a:pPr>
               <a:r>
-                <a:t>Team: [Add Team Name]  |  ID: [Add Team ID]</a:t>
+                <a:t>Team: Aalam dhudh soda  |  ID: anc-052</a:t>
               </a:r>
             </a:p>
           </p:txBody>
@@ -31391,7 +31391,7 @@
                 </a:lnSpc>
               </a:pPr>
               <a:r>
-                <a:t>Team: [Add Team Name]  |  ID: [Add Team ID]</a:t>
+                <a:t>Team: Aalam dhudh soda  |  ID: anc-052</a:t>
               </a:r>
             </a:p>
           </p:txBody>
@@ -35729,7 +35729,7 @@
                 </a:lnSpc>
               </a:pPr>
               <a:r>
-                <a:t>Team: [Add Team Name]  |  ID: [Add Team ID]</a:t>
+                <a:t>Team: Aalam dhudh soda  |  ID: anc-052</a:t>
               </a:r>
             </a:p>
           </p:txBody>
@@ -35988,7 +35988,7 @@
                 </a:lnSpc>
               </a:pPr>
               <a:r>
-                <a:t>Team Name: [Add Team Name]</a:t>
+                <a:t>Team Name: Aalam dhudh soda</a:t>
               </a:r>
             </a:p>
           </p:txBody>
@@ -36082,7 +36082,7 @@
                 </a:lnSpc>
               </a:pPr>
               <a:r>
-                <a:t>Team ID: [Add Team ID]  |  Problem Statement: Patient Deterioration Prediction</a:t>
+                <a:t>Team ID: anc-052  |  Problem Statement: Patient Deterioration Prediction</a:t>
               </a:r>
             </a:p>
           </p:txBody>
@@ -40361,7 +40361,7 @@
                 </a:lnSpc>
               </a:pPr>
               <a:r>
-                <a:t>Team: [Add Team Name]  |  ID: [Add Team ID]</a:t>
+                <a:t>Team: Aalam dhudh soda  |  ID: anc-052</a:t>
               </a:r>
             </a:p>
           </p:txBody>

--- a/submission/AesCodeNexus_Round1_Submission_Final_Technical_Patient_Deterioration_TeamReady.pptx
+++ b/submission/AesCodeNexus_Round1_Submission_Final_Technical_Patient_Deterioration_TeamReady.pptx
@@ -6142,7 +6142,7 @@
                 </a:lnSpc>
               </a:pPr>
               <a:r>
-                <a:t>Patient Deterioration Prediction</a:t>
+                <a:t>PS 2 - Patient Deterioration Prediction</a:t>
               </a:r>
             </a:p>
           </p:txBody>
@@ -6733,7 +6733,7 @@
                 </a:lnSpc>
               </a:pPr>
               <a:r>
-                <a:t>[Add Institution]</a:t>
+                <a:t>PES UNIVERSITY, BLR</a:t>
               </a:r>
             </a:p>
           </p:txBody>
@@ -36082,7 +36082,7 @@
                 </a:lnSpc>
               </a:pPr>
               <a:r>
-                <a:t>Team ID: anc-052  |  Problem Statement: Patient Deterioration Prediction</a:t>
+                <a:t>Team ID: anc-052  |  Problem Statement: PS 2 - Patient Deterioration Prediction</a:t>
               </a:r>
             </a:p>
           </p:txBody>

--- a/submission/AesCodeNexus_Round1_Submission_Final_Technical_Patient_Deterioration_TeamReady.pptx
+++ b/submission/AesCodeNexus_Round1_Submission_Final_Technical_Patient_Deterioration_TeamReady.pptx
@@ -5780,7 +5780,7 @@
                 </a:lnSpc>
               </a:pPr>
               <a:r>
-                <a:t>12-hour early warning from hourly vital-sign and lab time-series data with final PR-AUC 0.740</a:t>
+                <a:t>12-hour early warning from hourly vital-sign and lab time-series data with final submission PR-AUC 0.734</a:t>
               </a:r>
             </a:p>
           </p:txBody>
@@ -6930,7 +6930,7 @@
                 </a:lnSpc>
               </a:pPr>
               <a:r>
-                <a:t>26 March 2026</a:t>
+                <a:t>27 March 2026</a:t>
               </a:r>
             </a:p>
           </p:txBody>
@@ -11486,12 +11486,12 @@
             </a:p>
             <a:p>
               <a:r>
-                <a:t>Training: Group-aware 80/20 holdout by reconstructed episode; final tuned CatBoost retrained on the development split</a:t>
+                <a:t>Training: Group-aware 80/20 holdout by reconstructed episode; saved finalist retrained on dev split and revalidated on GPU</a:t>
               </a:r>
             </a:p>
             <a:p>
               <a:r>
-                <a:t>Final config: depth 8, 1450 trees, lr 0.048</a:t>
+                <a:t>Final config: depth 8, 1300 trees, lr 0.050</a:t>
               </a:r>
             </a:p>
           </p:txBody>
@@ -11865,7 +11865,7 @@
             </a:p>
             <a:p>
               <a:r>
-                <a:t>We benchmarked CatBoost against TCN, GRU+Attention, and Transformer encoders, then improved the repo best PR-AUC by 0.007.</a:t>
+                <a:t>We benchmarked CatBoost against TCN, GRU+Attention, and Transformer encoders, then kept the strongest tabular, deep, and hybrid finalists.</a:t>
               </a:r>
             </a:p>
             <a:p>
@@ -22637,7 +22637,7 @@
                 </a:lnSpc>
               </a:pPr>
               <a:r>
-                <a:t>CatBoostClassifier depth 8 with 1450 trees</a:t>
+                <a:t>CatBoostClassifier depth 8 with 1300 trees</a:t>
               </a:r>
             </a:p>
           </p:txBody>
@@ -24757,7 +24757,7 @@
                   </a:lnSpc>
                 </a:pPr>
                 <a:r>
-                  <a:t>97.12%</a:t>
+                  <a:t>97.14%</a:t>
                 </a:r>
               </a:p>
             </p:txBody>
@@ -25284,7 +25284,7 @@
                   </a:lnSpc>
                 </a:pPr>
                 <a:r>
-                  <a:t>75.07%</a:t>
+                  <a:t>75.77%</a:t>
                 </a:r>
               </a:p>
             </p:txBody>
@@ -25811,7 +25811,7 @@
                   </a:lnSpc>
                 </a:pPr>
                 <a:r>
-                  <a:t>67.68%</a:t>
+                  <a:t>66.88%</a:t>
                 </a:r>
               </a:p>
             </p:txBody>
@@ -26338,7 +26338,7 @@
                   </a:lnSpc>
                 </a:pPr>
                 <a:r>
-                  <a:t>0.712</a:t>
+                  <a:t>0.710</a:t>
                 </a:r>
               </a:p>
             </p:txBody>
@@ -26865,7 +26865,7 @@
                   </a:lnSpc>
                 </a:pPr>
                 <a:r>
-                  <a:t>0.963</a:t>
+                  <a:t>0.962</a:t>
                 </a:r>
               </a:p>
             </p:txBody>
@@ -27879,7 +27879,7 @@
                     <a:lstStyle/>
                     <a:p>
                       <a:r>
-                        <a:t>Saved Repo Best CatBoost</a:t>
+                        <a:t>Saved Submission CatBoost</a:t>
                       </a:r>
                     </a:p>
                   </a:txBody>
@@ -27928,7 +27928,7 @@
                     <a:lstStyle/>
                     <a:p>
                       <a:r>
-                        <a:t>0.732</a:t>
+                        <a:t>0.734</a:t>
                       </a:r>
                     </a:p>
                   </a:txBody>
@@ -28026,7 +28026,7 @@
                     <a:lstStyle/>
                     <a:p>
                       <a:r>
-                        <a:t>Previous best checked into the repo</a:t>
+                        <a:t>Kept repo artifact and strongest overall model</a:t>
                       </a:r>
                     </a:p>
                   </a:txBody>
@@ -28126,7 +28126,7 @@
                     <a:lstStyle/>
                     <a:p>
                       <a:r>
-                        <a:t>Final Tuned CatBoost</a:t>
+                        <a:t>Best Revalidated Single</a:t>
                       </a:r>
                     </a:p>
                   </a:txBody>
@@ -28175,7 +28175,7 @@
                     <a:lstStyle/>
                     <a:p>
                       <a:r>
-                        <a:t>0.740</a:t>
+                        <a:t>0.704</a:t>
                       </a:r>
                     </a:p>
                   </a:txBody>
@@ -28224,7 +28224,7 @@
                     <a:lstStyle/>
                     <a:p>
                       <a:r>
-                        <a:t>0.963</a:t>
+                        <a:t>0.964</a:t>
                       </a:r>
                     </a:p>
                   </a:txBody>
@@ -28273,7 +28273,7 @@
                     <a:lstStyle/>
                     <a:p>
                       <a:r>
-                        <a:t>Best overall score after revalidation and focused tuning</a:t>
+                        <a:t>GPU rerun winner: repo_catboost_subsample</a:t>
                       </a:r>
                     </a:p>
                   </a:txBody>
@@ -28373,7 +28373,7 @@
                     <a:lstStyle/>
                     <a:p>
                       <a:r>
-                        <a:t>focused_subsample_lr0045_iter1600</a:t>
+                        <a:t>Best Revalidated Ensemble</a:t>
                       </a:r>
                     </a:p>
                   </a:txBody>
@@ -28422,7 +28422,7 @@
                     <a:lstStyle/>
                     <a:p>
                       <a:r>
-                        <a:t>0.737</a:t>
+                        <a:t>0.705</a:t>
                       </a:r>
                     </a:p>
                   </a:txBody>
@@ -28471,7 +28471,7 @@
                     <a:lstStyle/>
                     <a:p>
                       <a:r>
-                        <a:t>0.963</a:t>
+                        <a:t>0.964</a:t>
                       </a:r>
                     </a:p>
                   </a:txBody>
@@ -28520,7 +28520,7 @@
                     <a:lstStyle/>
                     <a:p>
                       <a:r>
-                        <a:t>Next-best nearby CatBoost configuration</a:t>
+                        <a:t>Weighted CatBoost blend from the GPU rerun</a:t>
                       </a:r>
                     </a:p>
                   </a:txBody>
@@ -32634,7 +32634,7 @@
               </a:p>
               <a:p>
                 <a:r>
-                  <a:t>The final tuned CatBoost reached PR-AUC 0.740, improving over the repo best 0.732.</a:t>
+                  <a:t>The saved submission CatBoost reached PR-AUC 0.734, while the stricter GPU rerun topped out at 0.704 on an untouched outer holdout.</a:t>
                 </a:r>
               </a:p>
             </p:txBody>
@@ -33001,7 +33001,7 @@
               </a:p>
               <a:p>
                 <a:r>
-                  <a:t>The final revalidation in this environment was CPU-based, so we narrowed the search around the strongest CatBoost region.</a:t>
+                  <a:t>The final revalidation in this environment used the NVIDIA GPU, which let us screen 19 CatBoost candidates quickly and reproducibly.</a:t>
                 </a:r>
               </a:p>
             </p:txBody>
@@ -41429,7 +41429,7 @@
             </a:p>
             <a:p>
               <a:r>
-                <a:t>Compute: CPU-based final CatBoost revalidation in this environment; saved deep-learning repo artifacts used for comparison</a:t>
+                <a:t>Compute: GPU-based CatBoost revalidation on RTX 4060; saved deep-learning repo artifacts used for comparison</a:t>
               </a:r>
             </a:p>
             <a:p>
@@ -41973,7 +41973,7 @@
             </a:p>
             <a:p>
               <a:r>
-                <a:t>A literal zero-overfit claim is not supported; train PR-AUC 0.982 vs calibration PR-AUC 0.747.</a:t>
+                <a:t>A literal zero-overfit claim is not supported; best revalidated single model had train PR-AUC 0.825 vs calibration PR-AUC 0.745.</a:t>
               </a:r>
             </a:p>
             <a:p>
@@ -42359,7 +42359,7 @@
               </a:p>
               <a:p>
                 <a:r>
-                  <a:t>Final best model: focused_subsample_lr0048_iter1450 with PR-AUC 0.740, ROC-AUC 0.963, and alert F1 0.712.</a:t>
+                  <a:t>Final kept model: catboost_gpu_subsample_train80 with PR-AUC 0.734, ROC-AUC 0.962, and alert F1 0.710.</a:t>
                 </a:r>
               </a:p>
             </p:txBody>
